--- a/files/TRG-template.pptx
+++ b/files/TRG-template.pptx
@@ -1284,9 +1284,48 @@
           <a:ln/>
         </p:spPr>
       </p:sp>
+      <p:sp>
+        <p:nvSpPr>
+          <p:cNvPr id="5" name="Text 3"/>
+          <p:cNvSpPr txBox="1"/>
+          <p:nvPr/>
+        </p:nvSpPr>
+        <p:spPr>
+          <a:xfrm>
+            <a:off x="10497312" y="320040"/>
+            <a:ext cx="1188720" cy="502920"/>
+          </a:xfrm>
+          <a:prstGeom prst="rect">
+            <a:avLst/>
+          </a:prstGeom>
+          <a:noFill/>
+          <a:ln/>
+        </p:spPr>
+        <p:txBody>
+          <a:bodyPr wrap="square" lIns="0" tIns="0" rIns="0" bIns="0" rtlCol="0" anchor="ctr"/>
+          <a:lstStyle/>
+          <a:p>
+            <a:pPr algn="r" indent="0" marL="0">
+              <a:buNone/>
+            </a:pPr>
+            <a:r>
+              <a:rPr lang="en-US" sz="2600" b="1" i="1" dirty="0">
+                <a:solidFill>
+                  <a:srgbClr val="2774AE"/>
+                </a:solidFill>
+                <a:latin typeface="Helvetica" pitchFamily="34" charset="0"/>
+                <a:ea typeface="Helvetica" pitchFamily="34" charset="-122"/>
+                <a:cs typeface="Helvetica" pitchFamily="34" charset="-120"/>
+              </a:rPr>
+              <a:t>UCLA</a:t>
+            </a:r>
+            <a:endParaRPr lang="en-US" sz="2600" dirty="0"/>
+          </a:p>
+        </p:txBody>
+      </p:sp>
       <p:pic>
         <p:nvPicPr>
-          <p:cNvPr id="5" name="Image 0" descr="logo-mark.png">    </p:cNvPr>
+          <p:cNvPr id="6" name="Image 0" descr="logo-mark.png">    </p:cNvPr>
           <p:cNvPicPr>
             <a:picLocks noChangeAspect="1"/>
           </p:cNvPicPr>
@@ -1310,7 +1349,7 @@
       </p:pic>
       <p:sp>
         <p:nvSpPr>
-          <p:cNvPr id="6" name="Text 3"/>
+          <p:cNvPr id="7" name="Text 4"/>
           <p:cNvSpPr txBox="1"/>
           <p:nvPr/>
         </p:nvSpPr>
@@ -1349,7 +1388,7 @@
       </p:sp>
       <p:sp>
         <p:nvSpPr>
-          <p:cNvPr id="7" name="Text 4"/>
+          <p:cNvPr id="8" name="Text 5"/>
           <p:cNvSpPr txBox="1"/>
           <p:nvPr/>
         </p:nvSpPr>
@@ -1388,7 +1427,7 @@
       </p:sp>
       <p:sp>
         <p:nvSpPr>
-          <p:cNvPr id="8" name="Text 5"/>
+          <p:cNvPr id="9" name="Text 6"/>
           <p:cNvSpPr txBox="1"/>
           <p:nvPr/>
         </p:nvSpPr>
@@ -1470,7 +1509,7 @@
       </p:sp>
       <p:sp>
         <p:nvSpPr>
-          <p:cNvPr id="9" name="Shape 6"/>
+          <p:cNvPr id="10" name="Shape 7"/>
           <p:cNvSpPr/>
           <p:nvPr/>
         </p:nvSpPr>
@@ -1490,7 +1529,7 @@
       </p:sp>
       <p:sp>
         <p:nvSpPr>
-          <p:cNvPr id="10" name="Shape 7"/>
+          <p:cNvPr id="11" name="Shape 8"/>
           <p:cNvSpPr/>
           <p:nvPr/>
         </p:nvSpPr>
@@ -1510,7 +1549,7 @@
       </p:sp>
       <p:sp>
         <p:nvSpPr>
-          <p:cNvPr id="11" name="Shape 8"/>
+          <p:cNvPr id="12" name="Shape 9"/>
           <p:cNvSpPr/>
           <p:nvPr/>
         </p:nvSpPr>
@@ -2626,7 +2665,46 @@
       </p:sp>
       <p:sp>
         <p:nvSpPr>
-          <p:cNvPr id="8" name="Shape 5"/>
+          <p:cNvPr id="8" name="Text 5"/>
+          <p:cNvSpPr txBox="1"/>
+          <p:nvPr/>
+        </p:nvSpPr>
+        <p:spPr>
+          <a:xfrm>
+            <a:off x="0" y="4846320"/>
+            <a:ext cx="12188952" cy="411480"/>
+          </a:xfrm>
+          <a:prstGeom prst="rect">
+            <a:avLst/>
+          </a:prstGeom>
+          <a:noFill/>
+          <a:ln/>
+        </p:spPr>
+        <p:txBody>
+          <a:bodyPr wrap="square" lIns="0" tIns="0" rIns="0" bIns="0" rtlCol="0" anchor="ctr"/>
+          <a:lstStyle/>
+          <a:p>
+            <a:pPr algn="ctr" indent="0" marL="0">
+              <a:buNone/>
+            </a:pPr>
+            <a:r>
+              <a:rPr lang="en-US" sz="1300" dirty="0">
+                <a:solidFill>
+                  <a:srgbClr val="5F5E5A"/>
+                </a:solidFill>
+                <a:latin typeface="Helvetica" pitchFamily="34" charset="0"/>
+                <a:ea typeface="Helvetica" pitchFamily="34" charset="-122"/>
+                <a:cs typeface="Helvetica" pitchFamily="34" charset="-120"/>
+              </a:rPr>
+              <a:t>UCLA  ·  Civil &amp; Environmental Engineering</a:t>
+            </a:r>
+            <a:endParaRPr lang="en-US" sz="1300" dirty="0"/>
+          </a:p>
+        </p:txBody>
+      </p:sp>
+      <p:sp>
+        <p:nvSpPr>
+          <p:cNvPr id="9" name="Shape 6"/>
           <p:cNvSpPr/>
           <p:nvPr/>
         </p:nvSpPr>
@@ -2646,7 +2724,7 @@
       </p:sp>
       <p:sp>
         <p:nvSpPr>
-          <p:cNvPr id="9" name="Shape 6"/>
+          <p:cNvPr id="10" name="Shape 7"/>
           <p:cNvSpPr/>
           <p:nvPr/>
         </p:nvSpPr>
@@ -2666,7 +2744,7 @@
       </p:sp>
       <p:sp>
         <p:nvSpPr>
-          <p:cNvPr id="10" name="Shape 7"/>
+          <p:cNvPr id="11" name="Shape 8"/>
           <p:cNvSpPr/>
           <p:nvPr/>
         </p:nvSpPr>

--- a/files/TRG-template.pptx
+++ b/files/TRG-template.pptx
@@ -1284,48 +1284,9 @@
           <a:ln/>
         </p:spPr>
       </p:sp>
-      <p:sp>
-        <p:nvSpPr>
-          <p:cNvPr id="5" name="Text 3"/>
-          <p:cNvSpPr txBox="1"/>
-          <p:nvPr/>
-        </p:nvSpPr>
-        <p:spPr>
-          <a:xfrm>
-            <a:off x="10497312" y="320040"/>
-            <a:ext cx="1188720" cy="502920"/>
-          </a:xfrm>
-          <a:prstGeom prst="rect">
-            <a:avLst/>
-          </a:prstGeom>
-          <a:noFill/>
-          <a:ln/>
-        </p:spPr>
-        <p:txBody>
-          <a:bodyPr wrap="square" lIns="0" tIns="0" rIns="0" bIns="0" rtlCol="0" anchor="ctr"/>
-          <a:lstStyle/>
-          <a:p>
-            <a:pPr algn="r" indent="0" marL="0">
-              <a:buNone/>
-            </a:pPr>
-            <a:r>
-              <a:rPr lang="en-US" sz="2600" b="1" i="1" dirty="0">
-                <a:solidFill>
-                  <a:srgbClr val="2774AE"/>
-                </a:solidFill>
-                <a:latin typeface="Helvetica" pitchFamily="34" charset="0"/>
-                <a:ea typeface="Helvetica" pitchFamily="34" charset="-122"/>
-                <a:cs typeface="Helvetica" pitchFamily="34" charset="-120"/>
-              </a:rPr>
-              <a:t>UCLA</a:t>
-            </a:r>
-            <a:endParaRPr lang="en-US" sz="2600" dirty="0"/>
-          </a:p>
-        </p:txBody>
-      </p:sp>
       <p:pic>
         <p:nvPicPr>
-          <p:cNvPr id="6" name="Image 0" descr="logo-mark.png">    </p:cNvPr>
+          <p:cNvPr id="5" name="Image 0" descr="logo-mark.png">    </p:cNvPr>
           <p:cNvPicPr>
             <a:picLocks noChangeAspect="1"/>
           </p:cNvPicPr>
@@ -1349,7 +1310,7 @@
       </p:pic>
       <p:sp>
         <p:nvSpPr>
-          <p:cNvPr id="7" name="Text 4"/>
+          <p:cNvPr id="6" name="Text 3"/>
           <p:cNvSpPr txBox="1"/>
           <p:nvPr/>
         </p:nvSpPr>
@@ -1388,7 +1349,7 @@
       </p:sp>
       <p:sp>
         <p:nvSpPr>
-          <p:cNvPr id="8" name="Text 5"/>
+          <p:cNvPr id="7" name="Text 4"/>
           <p:cNvSpPr txBox="1"/>
           <p:nvPr/>
         </p:nvSpPr>
@@ -1427,7 +1388,7 @@
       </p:sp>
       <p:sp>
         <p:nvSpPr>
-          <p:cNvPr id="9" name="Text 6"/>
+          <p:cNvPr id="8" name="Text 5"/>
           <p:cNvSpPr txBox="1"/>
           <p:nvPr/>
         </p:nvSpPr>
@@ -1509,32 +1470,32 @@
       </p:sp>
       <p:sp>
         <p:nvSpPr>
+          <p:cNvPr id="9" name="Shape 6"/>
+          <p:cNvSpPr/>
+          <p:nvPr/>
+        </p:nvSpPr>
+        <p:spPr>
+          <a:xfrm>
+            <a:off x="0" y="6812280"/>
+            <a:ext cx="4062984" cy="45720"/>
+          </a:xfrm>
+          <a:prstGeom prst="rect">
+            <a:avLst/>
+          </a:prstGeom>
+          <a:solidFill>
+            <a:srgbClr val="3D85C6"/>
+          </a:solidFill>
+          <a:ln/>
+        </p:spPr>
+      </p:sp>
+      <p:sp>
+        <p:nvSpPr>
           <p:cNvPr id="10" name="Shape 7"/>
           <p:cNvSpPr/>
           <p:nvPr/>
         </p:nvSpPr>
         <p:spPr>
           <a:xfrm>
-            <a:off x="0" y="6812280"/>
-            <a:ext cx="4062984" cy="45720"/>
-          </a:xfrm>
-          <a:prstGeom prst="rect">
-            <a:avLst/>
-          </a:prstGeom>
-          <a:solidFill>
-            <a:srgbClr val="3D85C6"/>
-          </a:solidFill>
-          <a:ln/>
-        </p:spPr>
-      </p:sp>
-      <p:sp>
-        <p:nvSpPr>
-          <p:cNvPr id="11" name="Shape 8"/>
-          <p:cNvSpPr/>
-          <p:nvPr/>
-        </p:nvSpPr>
-        <p:spPr>
-          <a:xfrm>
             <a:off x="4062984" y="6812280"/>
             <a:ext cx="4062984" cy="45720"/>
           </a:xfrm>
@@ -1549,7 +1510,7 @@
       </p:sp>
       <p:sp>
         <p:nvSpPr>
-          <p:cNvPr id="12" name="Shape 9"/>
+          <p:cNvPr id="11" name="Shape 8"/>
           <p:cNvSpPr/>
           <p:nvPr/>
         </p:nvSpPr>
